--- a/LabBook_20.pptx
+++ b/LabBook_20.pptx
@@ -9220,6 +9220,45 @@
             </a:endParaRPr>
           </a:p>
           <a:p>
+            <a:pPr marL="800100" lvl="1" indent="-342900" algn="just">
+              <a:buFont typeface="Arial" panose="020B0604020202020204" pitchFamily="34" charset="0"/>
+              <a:buChar char="•"/>
+            </a:pPr>
+            <a:r>
+              <a:rPr lang="en-US" kern="0" dirty="0">
+                <a:solidFill>
+                  <a:sysClr val="windowText" lastClr="000000"/>
+                </a:solidFill>
+                <a:sym typeface="Wingdings" pitchFamily="2" charset="2"/>
+              </a:rPr>
+              <a:t>Terminal + ‘</a:t>
+            </a:r>
+            <a:r>
+              <a:rPr lang="en-US" kern="0" dirty="0" err="1">
+                <a:solidFill>
+                  <a:sysClr val="windowText" lastClr="000000"/>
+                </a:solidFill>
+                <a:sym typeface="Wingdings" pitchFamily="2" charset="2"/>
+              </a:rPr>
+              <a:t>uv</a:t>
+            </a:r>
+            <a:r>
+              <a:rPr lang="en-US" kern="0">
+                <a:solidFill>
+                  <a:sysClr val="windowText" lastClr="000000"/>
+                </a:solidFill>
+                <a:sym typeface="Wingdings" pitchFamily="2" charset="2"/>
+              </a:rPr>
+              <a:t> sync’</a:t>
+            </a:r>
+            <a:endParaRPr lang="en-US" kern="0" dirty="0">
+              <a:solidFill>
+                <a:sysClr val="windowText" lastClr="000000"/>
+              </a:solidFill>
+              <a:sym typeface="Wingdings" pitchFamily="2" charset="2"/>
+            </a:endParaRPr>
+          </a:p>
+          <a:p>
             <a:pPr marL="342900" indent="-342900" algn="just">
               <a:buFont typeface="Arial" panose="020B0604020202020204" pitchFamily="34" charset="0"/>
               <a:buChar char="•"/>
@@ -12970,8 +13009,8 @@
           </p:sp>
         </mc:Fallback>
       </mc:AlternateContent>
-      <mc:AlternateContent xmlns:mc="http://schemas.openxmlformats.org/markup-compatibility/2006">
-        <mc:Choice xmlns:a14="http://schemas.microsoft.com/office/drawing/2010/main" Requires="a14">
+      <mc:AlternateContent xmlns:mc="http://schemas.openxmlformats.org/markup-compatibility/2006" xmlns:a14="http://schemas.microsoft.com/office/drawing/2010/main">
+        <mc:Choice Requires="a14">
           <p:sp>
             <p:nvSpPr>
               <p:cNvPr id="10" name="CuadroTexto 9">
@@ -13057,7 +13096,7 @@
             </p:txBody>
           </p:sp>
         </mc:Choice>
-        <mc:Fallback>
+        <mc:Fallback xmlns="">
           <p:sp>
             <p:nvSpPr>
               <p:cNvPr id="10" name="CuadroTexto 9">
@@ -13428,8 +13467,8 @@
           </a:p>
         </p:txBody>
       </p:sp>
-      <mc:AlternateContent xmlns:mc="http://schemas.openxmlformats.org/markup-compatibility/2006">
-        <mc:Choice xmlns:a14="http://schemas.microsoft.com/office/drawing/2010/main" Requires="a14">
+      <mc:AlternateContent xmlns:mc="http://schemas.openxmlformats.org/markup-compatibility/2006" xmlns:a14="http://schemas.microsoft.com/office/drawing/2010/main">
+        <mc:Choice Requires="a14">
           <p:sp>
             <p:nvSpPr>
               <p:cNvPr id="4" name="Marcador de texto 2">
@@ -13663,7 +13702,7 @@
             </p:txBody>
           </p:sp>
         </mc:Choice>
-        <mc:Fallback>
+        <mc:Fallback xmlns="">
           <p:sp>
             <p:nvSpPr>
               <p:cNvPr id="4" name="Marcador de texto 2">

--- a/LabBook_20.pptx
+++ b/LabBook_20.pptx
@@ -819,7 +819,7 @@
           <a:p>
             <a:fld id="{8438F8DC-35B0-48E6-A86E-42F1F08DD00F}" type="datetimeFigureOut">
               <a:rPr lang="es-ES" smtClean="0"/>
-              <a:t>09/03/2026</a:t>
+              <a:t>24/03/2026</a:t>
             </a:fld>
             <a:endParaRPr lang="es-ES"/>
           </a:p>
@@ -996,7 +996,7 @@
           <a:p>
             <a:fld id="{FACBDC12-F39B-4B97-8F4D-6734F9D366FF}" type="datetimeFigureOut">
               <a:rPr lang="es-ES" smtClean="0"/>
-              <a:t>09/03/2026</a:t>
+              <a:t>24/03/2026</a:t>
             </a:fld>
             <a:endParaRPr lang="es-ES"/>
           </a:p>
@@ -5715,7 +5715,7 @@
         <p:spPr>
           <a:xfrm>
             <a:off x="609441" y="4819471"/>
-            <a:ext cx="11199971" cy="1200329"/>
+            <a:ext cx="11199971" cy="1384995"/>
           </a:xfrm>
           <a:prstGeom prst="rect">
             <a:avLst/>
@@ -5743,21 +5743,101 @@
                 <a:latin typeface="Arial" panose="020B0604020202020204" pitchFamily="34" charset="0"/>
                 <a:cs typeface="Arial" panose="020B0604020202020204" pitchFamily="34" charset="0"/>
               </a:rPr>
-              <a:t>Repeat all the design </a:t>
-            </a:r>
-            <a:r>
-              <a:rPr lang="en-US" sz="1200">
+              <a:t>Usar table, columna final, con N=4. </a:t>
+            </a:r>
+            <a:r>
+              <a:rPr lang="en-US" sz="1200" dirty="0" err="1">
                 <a:latin typeface="Arial" panose="020B0604020202020204" pitchFamily="34" charset="0"/>
                 <a:cs typeface="Arial" panose="020B0604020202020204" pitchFamily="34" charset="0"/>
               </a:rPr>
-              <a:t>process for a </a:t>
+              <a:t>hacer</a:t>
             </a:r>
             <a:r>
               <a:rPr lang="en-US" sz="1200" dirty="0">
                 <a:latin typeface="Arial" panose="020B0604020202020204" pitchFamily="34" charset="0"/>
                 <a:cs typeface="Arial" panose="020B0604020202020204" pitchFamily="34" charset="0"/>
               </a:rPr>
-              <a:t>1x4 MMI Coupler.  </a:t>
+              <a:t> un </a:t>
+            </a:r>
+            <a:r>
+              <a:rPr lang="en-US" sz="1200" dirty="0" err="1">
+                <a:latin typeface="Arial" panose="020B0604020202020204" pitchFamily="34" charset="0"/>
+                <a:cs typeface="Arial" panose="020B0604020202020204" pitchFamily="34" charset="0"/>
+              </a:rPr>
+              <a:t>analisis</a:t>
+            </a:r>
+            <a:r>
+              <a:rPr lang="en-US" sz="1200" dirty="0">
+                <a:latin typeface="Arial" panose="020B0604020202020204" pitchFamily="34" charset="0"/>
+                <a:cs typeface="Arial" panose="020B0604020202020204" pitchFamily="34" charset="0"/>
+              </a:rPr>
+              <a:t> similar al </a:t>
+            </a:r>
+            <a:r>
+              <a:rPr lang="en-US" sz="1200" dirty="0" err="1">
+                <a:latin typeface="Arial" panose="020B0604020202020204" pitchFamily="34" charset="0"/>
+                <a:cs typeface="Arial" panose="020B0604020202020204" pitchFamily="34" charset="0"/>
+              </a:rPr>
+              <a:t>que</a:t>
+            </a:r>
+            <a:r>
+              <a:rPr lang="en-US" sz="1200" dirty="0">
+                <a:latin typeface="Arial" panose="020B0604020202020204" pitchFamily="34" charset="0"/>
+                <a:cs typeface="Arial" panose="020B0604020202020204" pitchFamily="34" charset="0"/>
+              </a:rPr>
+              <a:t> </a:t>
+            </a:r>
+            <a:r>
+              <a:rPr lang="en-US" sz="1200" dirty="0" err="1">
+                <a:latin typeface="Arial" panose="020B0604020202020204" pitchFamily="34" charset="0"/>
+                <a:cs typeface="Arial" panose="020B0604020202020204" pitchFamily="34" charset="0"/>
+              </a:rPr>
+              <a:t>hemos</a:t>
+            </a:r>
+            <a:r>
+              <a:rPr lang="en-US" sz="1200" dirty="0">
+                <a:latin typeface="Arial" panose="020B0604020202020204" pitchFamily="34" charset="0"/>
+                <a:cs typeface="Arial" panose="020B0604020202020204" pitchFamily="34" charset="0"/>
+              </a:rPr>
+              <a:t> </a:t>
+            </a:r>
+            <a:r>
+              <a:rPr lang="en-US" sz="1200" dirty="0" err="1">
+                <a:latin typeface="Arial" panose="020B0604020202020204" pitchFamily="34" charset="0"/>
+                <a:cs typeface="Arial" panose="020B0604020202020204" pitchFamily="34" charset="0"/>
+              </a:rPr>
+              <a:t>hecho</a:t>
+            </a:r>
+            <a:r>
+              <a:rPr lang="en-US" sz="1200" dirty="0">
+                <a:latin typeface="Arial" panose="020B0604020202020204" pitchFamily="34" charset="0"/>
+                <a:cs typeface="Arial" panose="020B0604020202020204" pitchFamily="34" charset="0"/>
+              </a:rPr>
+              <a:t> con </a:t>
+            </a:r>
+            <a:r>
+              <a:rPr lang="en-US" sz="1200" dirty="0" err="1">
+                <a:latin typeface="Arial" panose="020B0604020202020204" pitchFamily="34" charset="0"/>
+                <a:cs typeface="Arial" panose="020B0604020202020204" pitchFamily="34" charset="0"/>
+              </a:rPr>
+              <a:t>el</a:t>
+            </a:r>
+            <a:r>
+              <a:rPr lang="en-US" sz="1200" dirty="0">
+                <a:latin typeface="Arial" panose="020B0604020202020204" pitchFamily="34" charset="0"/>
+                <a:cs typeface="Arial" panose="020B0604020202020204" pitchFamily="34" charset="0"/>
+              </a:rPr>
+              <a:t> 2.2 (?)</a:t>
+            </a:r>
+          </a:p>
+          <a:p>
+            <a:pPr algn="just"/>
+            <a:r>
+              <a:rPr lang="en-US" sz="1200" dirty="0">
+                <a:latin typeface="Arial" panose="020B0604020202020204" pitchFamily="34" charset="0"/>
+                <a:cs typeface="Arial" panose="020B0604020202020204" pitchFamily="34" charset="0"/>
+              </a:rPr>
+              <a:t>Repeat all the design process for a 1x4 MMI Coupler.  </a:t>
             </a:r>
           </a:p>
           <a:p>
